--- a/マニュアル/オペレーションハブ_請求書操作マニュアル.pptx
+++ b/マニュアル/オペレーションハブ_請求書操作マニュアル.pptx
@@ -12,6 +12,7 @@
     <p:sldId id="260" r:id="rId11"/>
     <p:sldId id="261" r:id="rId12"/>
     <p:sldId id="262" r:id="rId13"/>
+    <p:sldId id="264" r:id="rId15"/>
     <p:sldId id="263" r:id="rId14"/>
   </p:sldIdLst>
   <p:sldSz cx="12191695" cy="6858000" type="screen4x3"/>
@@ -8215,7 +8216,7 @@
                   <a:srgbClr val="FFFFFF"/>
                 </a:solidFill>
               </a:rPr>
-              <a:t>注意事項・よくあるつまずき</a:t>
+              <a:t>常駐先が増減したとき｜見るフォルダを直す</a:t>
             </a:r>
           </a:p>
         </p:txBody>
@@ -8249,7 +8250,7 @@
                   <a:srgbClr val="D8EFFB"/>
                 </a:solidFill>
               </a:rPr>
-              <a:t>多くは「シートの直し忘れ」と「対象者の取り違え」で起きます。</a:t>
+              <a:t>勤怠PDF・請求書Excel・提出先の場所を、画面の一覧から直せます。共有フォルダのCSVを開く必要はありません。</a:t>
             </a:r>
           </a:p>
         </p:txBody>
@@ -8284,6 +8285,826 @@
                 </a:solidFill>
               </a:rPr>
               <a:t>08</a:t>
+            </a:r>
+          </a:p>
+        </p:txBody>
+      </p:sp>
+      <p:sp>
+        <p:nvSpPr>
+          <p:cNvPr id="6" name="TextBox 5"/>
+          <p:cNvSpPr txBox="1"/>
+          <p:nvPr/>
+        </p:nvSpPr>
+        <p:spPr>
+          <a:xfrm>
+            <a:off x="502920" y="6510528"/>
+            <a:ext cx="8229600" cy="274320"/>
+          </a:xfrm>
+          <a:prstGeom prst="rect">
+            <a:avLst/>
+          </a:prstGeom>
+          <a:noFill/>
+        </p:spPr>
+        <p:txBody>
+          <a:bodyPr wrap="square">
+            <a:spAutoFit/>
+          </a:bodyPr>
+          <a:lstStyle/>
+          <a:p>
+            <a:pPr algn="l"/>
+            <a:r>
+              <a:rPr sz="900" b="0">
+                <a:solidFill>
+                  <a:srgbClr val="888888"/>
+                </a:solidFill>
+              </a:rPr>
+              <a:t>オペレーションハブ 請求書 操作マニュアル（2026-08-20版）</a:t>
+            </a:r>
+          </a:p>
+        </p:txBody>
+      </p:sp>
+      <p:sp>
+        <p:nvSpPr>
+          <p:cNvPr id="7" name="Rectangle 6"/>
+          <p:cNvSpPr/>
+          <p:nvPr/>
+        </p:nvSpPr>
+        <p:spPr>
+          <a:xfrm>
+            <a:off x="502920" y="1371600"/>
+            <a:ext cx="7772400" cy="4846320"/>
+          </a:xfrm>
+          <a:prstGeom prst="rect">
+            <a:avLst/>
+          </a:prstGeom>
+          <a:solidFill>
+            <a:srgbClr val="D0E8F5"/>
+          </a:solidFill>
+          <a:ln w="19050">
+            <a:solidFill>
+              <a:srgbClr val="008BD8"/>
+            </a:solidFill>
+          </a:ln>
+          <a:effectLst/>
+        </p:spPr>
+        <p:style>
+          <a:lnRef idx="1">
+            <a:schemeClr val="accent1"/>
+          </a:lnRef>
+          <a:fillRef idx="3">
+            <a:schemeClr val="accent1"/>
+          </a:fillRef>
+          <a:effectRef idx="2">
+            <a:schemeClr val="accent1"/>
+          </a:effectRef>
+          <a:fontRef idx="minor">
+            <a:schemeClr val="lt1"/>
+          </a:fontRef>
+        </p:style>
+        <p:txBody>
+          <a:bodyPr rtlCol="0" anchor="ctr"/>
+          <a:lstStyle/>
+          <a:p>
+            <a:pPr algn="ctr"/>
+          </a:p>
+        </p:txBody>
+      </p:sp>
+      <p:sp>
+        <p:nvSpPr>
+          <p:cNvPr id="8" name="TextBox 7"/>
+          <p:cNvSpPr txBox="1"/>
+          <p:nvPr/>
+        </p:nvSpPr>
+        <p:spPr>
+          <a:xfrm>
+            <a:off x="685800" y="3474720"/>
+            <a:ext cx="7406640" cy="640080"/>
+          </a:xfrm>
+          <a:prstGeom prst="rect">
+            <a:avLst/>
+          </a:prstGeom>
+          <a:noFill/>
+        </p:spPr>
+        <p:txBody>
+          <a:bodyPr wrap="square">
+            <a:spAutoFit/>
+          </a:bodyPr>
+          <a:lstStyle/>
+          <a:p>
+            <a:pPr algn="ctr"/>
+            <a:r>
+              <a:rPr sz="1100" b="0">
+                <a:solidFill>
+                  <a:srgbClr val="005FA3"/>
+                </a:solidFill>
+              </a:rPr>
+              <a:t>[  見るフォルダの一覧（3つのタブ）  ]</a:t>
+            </a:r>
+          </a:p>
+        </p:txBody>
+      </p:sp>
+      <p:sp>
+        <p:nvSpPr>
+          <p:cNvPr id="9" name="TextBox 8"/>
+          <p:cNvSpPr txBox="1"/>
+          <p:nvPr/>
+        </p:nvSpPr>
+        <p:spPr>
+          <a:xfrm>
+            <a:off x="8503920" y="1371600"/>
+            <a:ext cx="3108960" cy="365760"/>
+          </a:xfrm>
+          <a:prstGeom prst="rect">
+            <a:avLst/>
+          </a:prstGeom>
+          <a:noFill/>
+        </p:spPr>
+        <p:txBody>
+          <a:bodyPr wrap="square">
+            <a:spAutoFit/>
+          </a:bodyPr>
+          <a:lstStyle/>
+          <a:p>
+            <a:pPr algn="l"/>
+            <a:r>
+              <a:rPr sz="1500" b="1">
+                <a:solidFill>
+                  <a:srgbClr val="005FA3"/>
+                </a:solidFill>
+              </a:rPr>
+              <a:t>手順</a:t>
+            </a:r>
+          </a:p>
+        </p:txBody>
+      </p:sp>
+      <p:sp>
+        <p:nvSpPr>
+          <p:cNvPr id="10" name="Oval 9"/>
+          <p:cNvSpPr/>
+          <p:nvPr/>
+        </p:nvSpPr>
+        <p:spPr>
+          <a:xfrm>
+            <a:off x="8503920" y="1828800"/>
+            <a:ext cx="347472" cy="347472"/>
+          </a:xfrm>
+          <a:prstGeom prst="ellipse">
+            <a:avLst/>
+          </a:prstGeom>
+          <a:solidFill>
+            <a:srgbClr val="008BD8"/>
+          </a:solidFill>
+          <a:ln>
+            <a:noFill/>
+          </a:ln>
+          <a:effectLst/>
+        </p:spPr>
+        <p:style>
+          <a:lnRef idx="1">
+            <a:schemeClr val="accent1"/>
+          </a:lnRef>
+          <a:fillRef idx="3">
+            <a:schemeClr val="accent1"/>
+          </a:fillRef>
+          <a:effectRef idx="2">
+            <a:schemeClr val="accent1"/>
+          </a:effectRef>
+          <a:fontRef idx="minor">
+            <a:schemeClr val="lt1"/>
+          </a:fontRef>
+        </p:style>
+        <p:txBody>
+          <a:bodyPr rtlCol="0" anchor="ctr"/>
+          <a:lstStyle/>
+          <a:p>
+            <a:pPr algn="ctr"/>
+            <a:r>
+              <a:rPr sz="1500" b="1">
+                <a:solidFill>
+                  <a:srgbClr val="FFFFFF"/>
+                </a:solidFill>
+              </a:rPr>
+              <a:t>1</a:t>
+            </a:r>
+          </a:p>
+        </p:txBody>
+      </p:sp>
+      <p:sp>
+        <p:nvSpPr>
+          <p:cNvPr id="11" name="TextBox 10"/>
+          <p:cNvSpPr txBox="1"/>
+          <p:nvPr/>
+        </p:nvSpPr>
+        <p:spPr>
+          <a:xfrm>
+            <a:off x="8961120" y="1847088"/>
+            <a:ext cx="2743200" cy="685800"/>
+          </a:xfrm>
+          <a:prstGeom prst="rect">
+            <a:avLst/>
+          </a:prstGeom>
+          <a:noFill/>
+        </p:spPr>
+        <p:txBody>
+          <a:bodyPr wrap="square">
+            <a:spAutoFit/>
+          </a:bodyPr>
+          <a:lstStyle/>
+          <a:p>
+            <a:pPr algn="l"/>
+            <a:r>
+              <a:rPr sz="1250" b="0">
+                <a:solidFill>
+                  <a:srgbClr val="333333"/>
+                </a:solidFill>
+              </a:rPr>
+              <a:t>「請求書」タブを開く</a:t>
+            </a:r>
+          </a:p>
+        </p:txBody>
+      </p:sp>
+      <p:sp>
+        <p:nvSpPr>
+          <p:cNvPr id="12" name="Oval 11"/>
+          <p:cNvSpPr/>
+          <p:nvPr/>
+        </p:nvSpPr>
+        <p:spPr>
+          <a:xfrm>
+            <a:off x="8503920" y="2587752"/>
+            <a:ext cx="347472" cy="347472"/>
+          </a:xfrm>
+          <a:prstGeom prst="ellipse">
+            <a:avLst/>
+          </a:prstGeom>
+          <a:solidFill>
+            <a:srgbClr val="008BD8"/>
+          </a:solidFill>
+          <a:ln>
+            <a:noFill/>
+          </a:ln>
+          <a:effectLst/>
+        </p:spPr>
+        <p:style>
+          <a:lnRef idx="1">
+            <a:schemeClr val="accent1"/>
+          </a:lnRef>
+          <a:fillRef idx="3">
+            <a:schemeClr val="accent1"/>
+          </a:fillRef>
+          <a:effectRef idx="2">
+            <a:schemeClr val="accent1"/>
+          </a:effectRef>
+          <a:fontRef idx="minor">
+            <a:schemeClr val="lt1"/>
+          </a:fontRef>
+        </p:style>
+        <p:txBody>
+          <a:bodyPr rtlCol="0" anchor="ctr"/>
+          <a:lstStyle/>
+          <a:p>
+            <a:pPr algn="ctr"/>
+            <a:r>
+              <a:rPr sz="1500" b="1">
+                <a:solidFill>
+                  <a:srgbClr val="FFFFFF"/>
+                </a:solidFill>
+              </a:rPr>
+              <a:t>2</a:t>
+            </a:r>
+          </a:p>
+        </p:txBody>
+      </p:sp>
+      <p:sp>
+        <p:nvSpPr>
+          <p:cNvPr id="13" name="TextBox 12"/>
+          <p:cNvSpPr txBox="1"/>
+          <p:nvPr/>
+        </p:nvSpPr>
+        <p:spPr>
+          <a:xfrm>
+            <a:off x="8961120" y="2606040"/>
+            <a:ext cx="2743200" cy="685800"/>
+          </a:xfrm>
+          <a:prstGeom prst="rect">
+            <a:avLst/>
+          </a:prstGeom>
+          <a:noFill/>
+        </p:spPr>
+        <p:txBody>
+          <a:bodyPr wrap="square">
+            <a:spAutoFit/>
+          </a:bodyPr>
+          <a:lstStyle/>
+          <a:p>
+            <a:pPr algn="l"/>
+            <a:r>
+              <a:rPr sz="1250" b="0">
+                <a:solidFill>
+                  <a:srgbClr val="333333"/>
+                </a:solidFill>
+              </a:rPr>
+              <a:t>「見るフォルダの一覧」を押す</a:t>
+            </a:r>
+          </a:p>
+        </p:txBody>
+      </p:sp>
+      <p:sp>
+        <p:nvSpPr>
+          <p:cNvPr id="14" name="Oval 13"/>
+          <p:cNvSpPr/>
+          <p:nvPr/>
+        </p:nvSpPr>
+        <p:spPr>
+          <a:xfrm>
+            <a:off x="8503920" y="3346704"/>
+            <a:ext cx="347472" cy="347472"/>
+          </a:xfrm>
+          <a:prstGeom prst="ellipse">
+            <a:avLst/>
+          </a:prstGeom>
+          <a:solidFill>
+            <a:srgbClr val="008BD8"/>
+          </a:solidFill>
+          <a:ln>
+            <a:noFill/>
+          </a:ln>
+          <a:effectLst/>
+        </p:spPr>
+        <p:style>
+          <a:lnRef idx="1">
+            <a:schemeClr val="accent1"/>
+          </a:lnRef>
+          <a:fillRef idx="3">
+            <a:schemeClr val="accent1"/>
+          </a:fillRef>
+          <a:effectRef idx="2">
+            <a:schemeClr val="accent1"/>
+          </a:effectRef>
+          <a:fontRef idx="minor">
+            <a:schemeClr val="lt1"/>
+          </a:fontRef>
+        </p:style>
+        <p:txBody>
+          <a:bodyPr rtlCol="0" anchor="ctr"/>
+          <a:lstStyle/>
+          <a:p>
+            <a:pPr algn="ctr"/>
+            <a:r>
+              <a:rPr sz="1500" b="1">
+                <a:solidFill>
+                  <a:srgbClr val="FFFFFF"/>
+                </a:solidFill>
+              </a:rPr>
+              <a:t>3</a:t>
+            </a:r>
+          </a:p>
+        </p:txBody>
+      </p:sp>
+      <p:sp>
+        <p:nvSpPr>
+          <p:cNvPr id="15" name="TextBox 14"/>
+          <p:cNvSpPr txBox="1"/>
+          <p:nvPr/>
+        </p:nvSpPr>
+        <p:spPr>
+          <a:xfrm>
+            <a:off x="8961120" y="3364992"/>
+            <a:ext cx="2743200" cy="685800"/>
+          </a:xfrm>
+          <a:prstGeom prst="rect">
+            <a:avLst/>
+          </a:prstGeom>
+          <a:noFill/>
+        </p:spPr>
+        <p:txBody>
+          <a:bodyPr wrap="square">
+            <a:spAutoFit/>
+          </a:bodyPr>
+          <a:lstStyle/>
+          <a:p>
+            <a:pPr algn="l"/>
+            <a:r>
+              <a:rPr sz="1250" b="0">
+                <a:solidFill>
+                  <a:srgbClr val="333333"/>
+                </a:solidFill>
+              </a:rPr>
+              <a:t>直したいタブを選ぶ（3つ）</a:t>
+            </a:r>
+          </a:p>
+        </p:txBody>
+      </p:sp>
+      <p:sp>
+        <p:nvSpPr>
+          <p:cNvPr id="16" name="Oval 15"/>
+          <p:cNvSpPr/>
+          <p:nvPr/>
+        </p:nvSpPr>
+        <p:spPr>
+          <a:xfrm>
+            <a:off x="8503920" y="4105656"/>
+            <a:ext cx="347472" cy="347472"/>
+          </a:xfrm>
+          <a:prstGeom prst="ellipse">
+            <a:avLst/>
+          </a:prstGeom>
+          <a:solidFill>
+            <a:srgbClr val="008BD8"/>
+          </a:solidFill>
+          <a:ln>
+            <a:noFill/>
+          </a:ln>
+          <a:effectLst/>
+        </p:spPr>
+        <p:style>
+          <a:lnRef idx="1">
+            <a:schemeClr val="accent1"/>
+          </a:lnRef>
+          <a:fillRef idx="3">
+            <a:schemeClr val="accent1"/>
+          </a:fillRef>
+          <a:effectRef idx="2">
+            <a:schemeClr val="accent1"/>
+          </a:effectRef>
+          <a:fontRef idx="minor">
+            <a:schemeClr val="lt1"/>
+          </a:fontRef>
+        </p:style>
+        <p:txBody>
+          <a:bodyPr rtlCol="0" anchor="ctr"/>
+          <a:lstStyle/>
+          <a:p>
+            <a:pPr algn="ctr"/>
+            <a:r>
+              <a:rPr sz="1500" b="1">
+                <a:solidFill>
+                  <a:srgbClr val="FFFFFF"/>
+                </a:solidFill>
+              </a:rPr>
+              <a:t>4</a:t>
+            </a:r>
+          </a:p>
+        </p:txBody>
+      </p:sp>
+      <p:sp>
+        <p:nvSpPr>
+          <p:cNvPr id="17" name="TextBox 16"/>
+          <p:cNvSpPr txBox="1"/>
+          <p:nvPr/>
+        </p:nvSpPr>
+        <p:spPr>
+          <a:xfrm>
+            <a:off x="8961120" y="4123944"/>
+            <a:ext cx="2743200" cy="685800"/>
+          </a:xfrm>
+          <a:prstGeom prst="rect">
+            <a:avLst/>
+          </a:prstGeom>
+          <a:noFill/>
+        </p:spPr>
+        <p:txBody>
+          <a:bodyPr wrap="square">
+            <a:spAutoFit/>
+          </a:bodyPr>
+          <a:lstStyle/>
+          <a:p>
+            <a:pPr algn="l"/>
+            <a:r>
+              <a:rPr sz="1250" b="0">
+                <a:solidFill>
+                  <a:srgbClr val="333333"/>
+                </a:solidFill>
+              </a:rPr>
+              <a:t>パスとファイル名を直す</a:t>
+            </a:r>
+          </a:p>
+        </p:txBody>
+      </p:sp>
+      <p:sp>
+        <p:nvSpPr>
+          <p:cNvPr id="18" name="Oval 17"/>
+          <p:cNvSpPr/>
+          <p:nvPr/>
+        </p:nvSpPr>
+        <p:spPr>
+          <a:xfrm>
+            <a:off x="8503920" y="4864608"/>
+            <a:ext cx="347472" cy="347472"/>
+          </a:xfrm>
+          <a:prstGeom prst="ellipse">
+            <a:avLst/>
+          </a:prstGeom>
+          <a:solidFill>
+            <a:srgbClr val="008BD8"/>
+          </a:solidFill>
+          <a:ln>
+            <a:noFill/>
+          </a:ln>
+          <a:effectLst/>
+        </p:spPr>
+        <p:style>
+          <a:lnRef idx="1">
+            <a:schemeClr val="accent1"/>
+          </a:lnRef>
+          <a:fillRef idx="3">
+            <a:schemeClr val="accent1"/>
+          </a:fillRef>
+          <a:effectRef idx="2">
+            <a:schemeClr val="accent1"/>
+          </a:effectRef>
+          <a:fontRef idx="minor">
+            <a:schemeClr val="lt1"/>
+          </a:fontRef>
+        </p:style>
+        <p:txBody>
+          <a:bodyPr rtlCol="0" anchor="ctr"/>
+          <a:lstStyle/>
+          <a:p>
+            <a:pPr algn="ctr"/>
+            <a:r>
+              <a:rPr sz="1500" b="1">
+                <a:solidFill>
+                  <a:srgbClr val="FFFFFF"/>
+                </a:solidFill>
+              </a:rPr>
+              <a:t>5</a:t>
+            </a:r>
+          </a:p>
+        </p:txBody>
+      </p:sp>
+      <p:sp>
+        <p:nvSpPr>
+          <p:cNvPr id="19" name="TextBox 18"/>
+          <p:cNvSpPr txBox="1"/>
+          <p:nvPr/>
+        </p:nvSpPr>
+        <p:spPr>
+          <a:xfrm>
+            <a:off x="8961120" y="4882896"/>
+            <a:ext cx="2743200" cy="685800"/>
+          </a:xfrm>
+          <a:prstGeom prst="rect">
+            <a:avLst/>
+          </a:prstGeom>
+          <a:noFill/>
+        </p:spPr>
+        <p:txBody>
+          <a:bodyPr wrap="square">
+            <a:spAutoFit/>
+          </a:bodyPr>
+          <a:lstStyle/>
+          <a:p>
+            <a:pPr algn="l"/>
+            <a:r>
+              <a:rPr sz="1250" b="0">
+                <a:solidFill>
+                  <a:srgbClr val="333333"/>
+                </a:solidFill>
+              </a:rPr>
+              <a:t>状態を確認してから保存する</a:t>
+            </a:r>
+          </a:p>
+        </p:txBody>
+      </p:sp>
+      <p:sp>
+        <p:nvSpPr>
+          <p:cNvPr id="20" name="Rectangle 19"/>
+          <p:cNvSpPr/>
+          <p:nvPr/>
+        </p:nvSpPr>
+        <p:spPr>
+          <a:xfrm>
+            <a:off x="8503920" y="5715000"/>
+            <a:ext cx="3200400" cy="18288"/>
+          </a:xfrm>
+          <a:prstGeom prst="rect">
+            <a:avLst/>
+          </a:prstGeom>
+          <a:solidFill>
+            <a:srgbClr val="DDDDDD"/>
+          </a:solidFill>
+          <a:ln>
+            <a:noFill/>
+          </a:ln>
+          <a:effectLst/>
+        </p:spPr>
+        <p:style>
+          <a:lnRef idx="1">
+            <a:schemeClr val="accent1"/>
+          </a:lnRef>
+          <a:fillRef idx="3">
+            <a:schemeClr val="accent1"/>
+          </a:fillRef>
+          <a:effectRef idx="2">
+            <a:schemeClr val="accent1"/>
+          </a:effectRef>
+          <a:fontRef idx="minor">
+            <a:schemeClr val="lt1"/>
+          </a:fontRef>
+        </p:style>
+        <p:txBody>
+          <a:bodyPr rtlCol="0" anchor="ctr"/>
+          <a:lstStyle/>
+          <a:p>
+            <a:pPr algn="ctr"/>
+          </a:p>
+        </p:txBody>
+      </p:sp>
+      <p:sp>
+        <p:nvSpPr>
+          <p:cNvPr id="21" name="TextBox 20"/>
+          <p:cNvSpPr txBox="1"/>
+          <p:nvPr/>
+        </p:nvSpPr>
+        <p:spPr>
+          <a:xfrm>
+            <a:off x="8503920" y="5852160"/>
+            <a:ext cx="3200400" cy="914400"/>
+          </a:xfrm>
+          <a:prstGeom prst="rect">
+            <a:avLst/>
+          </a:prstGeom>
+          <a:noFill/>
+        </p:spPr>
+        <p:txBody>
+          <a:bodyPr wrap="square">
+            <a:spAutoFit/>
+          </a:bodyPr>
+          <a:lstStyle/>
+          <a:p>
+            <a:pPr algn="l"/>
+            <a:r>
+              <a:rPr sz="1100" b="0">
+                <a:solidFill>
+                  <a:srgbClr val="005FA3"/>
+                </a:solidFill>
+              </a:rPr>
+              <a:t>「＋ 人を追加」で人を増やせます。直せるのは谷津さん・平良さん・一戸さんの3名で、保存前のCSVは _backup に残ります。</a:t>
+            </a:r>
+          </a:p>
+        </p:txBody>
+      </p:sp>
+    </p:spTree>
+  </p:cSld>
+  <p:clrMapOvr>
+    <a:masterClrMapping/>
+  </p:clrMapOvr>
+</p:sld>
+</file>
+
+<file path=ppt/slides/slide9.xml><?xml version="1.0" encoding="utf-8"?>
+<p:sld xmlns:a="http://schemas.openxmlformats.org/drawingml/2006/main" xmlns:p="http://schemas.openxmlformats.org/presentationml/2006/main" xmlns:r="http://schemas.openxmlformats.org/officeDocument/2006/relationships">
+  <p:cSld>
+    <p:spTree>
+      <p:nvGrpSpPr>
+        <p:cNvPr id="1" name=""/>
+        <p:cNvGrpSpPr/>
+        <p:nvPr/>
+      </p:nvGrpSpPr>
+      <p:grpSpPr/>
+      <p:sp>
+        <p:nvSpPr>
+          <p:cNvPr id="2" name="Rectangle 1"/>
+          <p:cNvSpPr/>
+          <p:nvPr/>
+        </p:nvSpPr>
+        <p:spPr>
+          <a:xfrm>
+            <a:off x="0" y="0"/>
+            <a:ext cx="12191695" cy="1005840"/>
+          </a:xfrm>
+          <a:prstGeom prst="rect">
+            <a:avLst/>
+          </a:prstGeom>
+          <a:solidFill>
+            <a:srgbClr val="008BD8"/>
+          </a:solidFill>
+          <a:ln>
+            <a:noFill/>
+          </a:ln>
+          <a:effectLst/>
+        </p:spPr>
+        <p:style>
+          <a:lnRef idx="1">
+            <a:schemeClr val="accent1"/>
+          </a:lnRef>
+          <a:fillRef idx="3">
+            <a:schemeClr val="accent1"/>
+          </a:fillRef>
+          <a:effectRef idx="2">
+            <a:schemeClr val="accent1"/>
+          </a:effectRef>
+          <a:fontRef idx="minor">
+            <a:schemeClr val="lt1"/>
+          </a:fontRef>
+        </p:style>
+        <p:txBody>
+          <a:bodyPr rtlCol="0" anchor="ctr"/>
+          <a:lstStyle/>
+          <a:p>
+            <a:pPr algn="ctr"/>
+          </a:p>
+        </p:txBody>
+      </p:sp>
+      <p:sp>
+        <p:nvSpPr>
+          <p:cNvPr id="3" name="TextBox 2"/>
+          <p:cNvSpPr txBox="1"/>
+          <p:nvPr/>
+        </p:nvSpPr>
+        <p:spPr>
+          <a:xfrm>
+            <a:off x="502920" y="146304"/>
+            <a:ext cx="9692640" cy="502920"/>
+          </a:xfrm>
+          <a:prstGeom prst="rect">
+            <a:avLst/>
+          </a:prstGeom>
+          <a:noFill/>
+        </p:spPr>
+        <p:txBody>
+          <a:bodyPr wrap="square">
+            <a:spAutoFit/>
+          </a:bodyPr>
+          <a:lstStyle/>
+          <a:p>
+            <a:pPr algn="l"/>
+            <a:r>
+              <a:rPr sz="2400" b="1">
+                <a:solidFill>
+                  <a:srgbClr val="FFFFFF"/>
+                </a:solidFill>
+              </a:rPr>
+              <a:t>注意事項・よくあるつまずき</a:t>
+            </a:r>
+          </a:p>
+        </p:txBody>
+      </p:sp>
+      <p:sp>
+        <p:nvSpPr>
+          <p:cNvPr id="4" name="TextBox 3"/>
+          <p:cNvSpPr txBox="1"/>
+          <p:nvPr/>
+        </p:nvSpPr>
+        <p:spPr>
+          <a:xfrm>
+            <a:off x="521207" y="621792"/>
+            <a:ext cx="10058400" cy="320040"/>
+          </a:xfrm>
+          <a:prstGeom prst="rect">
+            <a:avLst/>
+          </a:prstGeom>
+          <a:noFill/>
+        </p:spPr>
+        <p:txBody>
+          <a:bodyPr wrap="square">
+            <a:spAutoFit/>
+          </a:bodyPr>
+          <a:lstStyle/>
+          <a:p>
+            <a:pPr algn="l"/>
+            <a:r>
+              <a:rPr sz="1150" b="0">
+                <a:solidFill>
+                  <a:srgbClr val="D8EFFB"/>
+                </a:solidFill>
+              </a:rPr>
+              <a:t>多くは「シートの直し忘れ」と「対象者の取り違え」で起きます。</a:t>
+            </a:r>
+          </a:p>
+        </p:txBody>
+      </p:sp>
+      <p:sp>
+        <p:nvSpPr>
+          <p:cNvPr id="5" name="TextBox 4"/>
+          <p:cNvSpPr txBox="1"/>
+          <p:nvPr/>
+        </p:nvSpPr>
+        <p:spPr>
+          <a:xfrm>
+            <a:off x="11292840" y="201168"/>
+            <a:ext cx="731520" cy="548640"/>
+          </a:xfrm>
+          <a:prstGeom prst="rect">
+            <a:avLst/>
+          </a:prstGeom>
+          <a:noFill/>
+        </p:spPr>
+        <p:txBody>
+          <a:bodyPr wrap="square">
+            <a:spAutoFit/>
+          </a:bodyPr>
+          <a:lstStyle/>
+          <a:p>
+            <a:pPr algn="r"/>
+            <a:r>
+              <a:rPr sz="2200" b="1">
+                <a:solidFill>
+                  <a:srgbClr val="FFFFFF"/>
+                </a:solidFill>
+              </a:rPr>
+              <a:t>09</a:t>
             </a:r>
           </a:p>
         </p:txBody>
@@ -8773,7 +9594,7 @@
                   <a:srgbClr val="333333"/>
                 </a:solidFill>
               </a:rPr>
-              <a:t>対象フォルダ・取引先・対象外・内訳・PDF作成設定の5本はすべて Z:\API連携\docs\ にあります。直せばアプリを作り直さずに効きます。</a:t>
+              <a:t>対象フォルダ・取引先・対象外・内訳・PDF作成設定の5本はすべて Z:\API連携\docs\ にあります。このうち PDF作成設定と対象フォルダは、①ブロックの「見るフォルダの一覧を表示」から画面で直せます。</a:t>
             </a:r>
           </a:p>
         </p:txBody>

--- a/マニュアル/オペレーションハブ_請求書操作マニュアル.pptx
+++ b/マニュアル/オペレーションハブ_請求書操作マニュアル.pptx
@@ -3469,7 +3469,7 @@
                   <a:srgbClr val="888888"/>
                 </a:solidFill>
               </a:rPr>
-              <a:t>オペレーションハブ 請求書 操作マニュアル（2026-08-20版）</a:t>
+              <a:t>オペレーションハブ 請求書 操作マニュアル（2026-09-02版）</a:t>
             </a:r>
           </a:p>
         </p:txBody>
@@ -4091,7 +4091,7 @@
                   <a:srgbClr val="888888"/>
                 </a:solidFill>
               </a:rPr>
-              <a:t>オペレーションハブ 請求書 操作マニュアル（2026-08-20版）</a:t>
+              <a:t>オペレーションハブ 請求書 操作マニュアル（2026-09-02版）</a:t>
             </a:r>
           </a:p>
         </p:txBody>
@@ -5344,7 +5344,7 @@
                   <a:srgbClr val="888888"/>
                 </a:solidFill>
               </a:rPr>
-              <a:t>オペレーションハブ 請求書 操作マニュアル（2026-08-20版）</a:t>
+              <a:t>オペレーションハブ 請求書 操作マニュアル（2026-09-02版）</a:t>
             </a:r>
           </a:p>
         </p:txBody>
@@ -6164,7 +6164,7 @@
                   <a:srgbClr val="888888"/>
                 </a:solidFill>
               </a:rPr>
-              <a:t>オペレーションハブ 請求書 操作マニュアル（2026-08-20版）</a:t>
+              <a:t>オペレーションハブ 請求書 操作マニュアル（2026-09-02版）</a:t>
             </a:r>
           </a:p>
         </p:txBody>
@@ -6678,7 +6678,7 @@
                   <a:srgbClr val="888888"/>
                 </a:solidFill>
               </a:rPr>
-              <a:t>オペレーションハブ 請求書 操作マニュアル（2026-08-20版）</a:t>
+              <a:t>オペレーションハブ 請求書 操作マニュアル（2026-09-02版）</a:t>
             </a:r>
           </a:p>
         </p:txBody>
@@ -7498,7 +7498,7 @@
                   <a:srgbClr val="888888"/>
                 </a:solidFill>
               </a:rPr>
-              <a:t>オペレーションハブ 請求書 操作マニュアル（2026-08-20版）</a:t>
+              <a:t>オペレーションハブ 請求書 操作マニュアル（2026-09-02版）</a:t>
             </a:r>
           </a:p>
         </p:txBody>
@@ -8120,7 +8120,7 @@
                   <a:srgbClr val="005FA3"/>
                 </a:solidFill>
               </a:rPr>
-              <a:t>売上高は外税（金額＝税抜・税額は別欄）、交通費のみ内税で出ます。部門はjinjerのカスタム項目から入ります。</a:t>
+              <a:t>売上高・交通費とも内税（金額＝税込・税額は別欄）で出ます。部門・氏名はjinjerから入ります（氏名はfreeeと同じ「姓 名」）。</a:t>
             </a:r>
           </a:p>
         </p:txBody>
@@ -8318,7 +8318,7 @@
                   <a:srgbClr val="888888"/>
                 </a:solidFill>
               </a:rPr>
-              <a:t>オペレーションハブ 請求書 操作マニュアル（2026-08-20版）</a:t>
+              <a:t>オペレーションハブ 請求書 操作マニュアル（2026-09-02版）</a:t>
             </a:r>
           </a:p>
         </p:txBody>
@@ -9138,7 +9138,7 @@
                   <a:srgbClr val="888888"/>
                 </a:solidFill>
               </a:rPr>
-              <a:t>オペレーションハブ 請求書 操作マニュアル（2026-08-20版）</a:t>
+              <a:t>オペレーションハブ 請求書 操作マニュアル（2026-09-02版）</a:t>
             </a:r>
           </a:p>
         </p:txBody>
